--- a/assets/pptx/catalog-144.pptx
+++ b/assets/pptx/catalog-144.pptx
@@ -3403,7 +3403,7 @@
                 <a:ea typeface="Ebrima"/>
                 <a:cs typeface="Ebrima"/>
               </a:rPr>
-              <a:t>አመለጥቁኝ (6x)</a:t>
+              <a:t>አመለጥቁኝ 6x</a:t>
             </a:r>
           </a:p>
         </p:txBody>
@@ -3470,7 +3470,7 @@
                 <a:ea typeface="Ebrima"/>
                 <a:cs typeface="Ebrima"/>
               </a:rPr>
-              <a:t>እግዚአብሔር ድንቅ ነገር ነው ያደረገልን (2x)</a:t>
+              <a:t>እግዚአብሔር ድንቅ ነገር ነው ያደረገልን 2x</a:t>
             </a:r>
           </a:p>
           <a:p>
@@ -3488,7 +3488,7 @@
                 <a:ea typeface="Ebrima"/>
                 <a:cs typeface="Ebrima"/>
               </a:rPr>
-              <a:t>ሳንጠፋ ቀኑ ሳይጨልም ደረሰልን (2x)</a:t>
+              <a:t>ሳንጠፋ ቀኑ ሳይጨልም ደረሰልን 2x</a:t>
             </a:r>
           </a:p>
           <a:p>
@@ -3506,7 +3506,7 @@
                 <a:ea typeface="Ebrima"/>
                 <a:cs typeface="Ebrima"/>
               </a:rPr>
-              <a:t>እግዚአብሔር ድንቅ ነገር ነው ያደረገልን (2x)</a:t>
+              <a:t>እግዚአብሔር ድንቅ ነገር ነው ያደረገልን 2x</a:t>
             </a:r>
           </a:p>
           <a:p>
@@ -3524,7 +3524,7 @@
                 <a:ea typeface="Ebrima"/>
                 <a:cs typeface="Ebrima"/>
               </a:rPr>
-              <a:t>ሳንጠፋ ሳይመሽብን ደረሰልን (2x)</a:t>
+              <a:t>ሳንጠፋ ሳይመሽብን ደረሰልን 2x</a:t>
             </a:r>
           </a:p>
         </p:txBody>
@@ -3591,7 +3591,7 @@
                 <a:ea typeface="Ebrima"/>
                 <a:cs typeface="Ebrima"/>
               </a:rPr>
-              <a:t>ወጥመዱ ተሰባበረ እኛም አመለጥን (2x)</a:t>
+              <a:t>ወጥመዱ ተሰባበረ እኛም አመለጥን 2x</a:t>
             </a:r>
           </a:p>
           <a:p>
@@ -3609,7 +3609,7 @@
                 <a:ea typeface="Ebrima"/>
                 <a:cs typeface="Ebrima"/>
               </a:rPr>
-              <a:t>አመለጥን (4x)</a:t>
+              <a:t>አመለጥን 4x</a:t>
             </a:r>
           </a:p>
         </p:txBody>
@@ -3676,7 +3676,7 @@
                 <a:ea typeface="Ebrima"/>
                 <a:cs typeface="Ebrima"/>
               </a:rPr>
-              <a:t>አይቶ ልቡ አልችል ሲለው አንድያ ልጁን ሰደደው (2x)</a:t>
+              <a:t>አይቶ ልቡ አልችል ሲለው አንድያ ልጁን ሰደደው 2x</a:t>
             </a:r>
           </a:p>
           <a:p>
@@ -3694,7 +3694,7 @@
                 <a:ea typeface="Ebrima"/>
                 <a:cs typeface="Ebrima"/>
               </a:rPr>
-              <a:t>አይቶ ልቡ አልችል ሲለው የኔ ጌታ አንድያ ልጁን ሰደደው (2x)</a:t>
+              <a:t>አይቶ ልቡ አልችል ሲለው የኔ ጌታ አንድያ ልጁን ሰደደው 2x</a:t>
             </a:r>
           </a:p>
           <a:p>
@@ -3712,7 +3712,7 @@
                 <a:ea typeface="Ebrima"/>
                 <a:cs typeface="Ebrima"/>
               </a:rPr>
-              <a:t>ወዶ ስለመረጥኝ በአብ ቀኝ አስቀመጠኝ (2x)</a:t>
+              <a:t>ወዶ ስለመረጥኝ በአብ ቀኝ አስቀመጠኝ 2x</a:t>
             </a:r>
           </a:p>
           <a:p>
@@ -3730,7 +3730,7 @@
                 <a:ea typeface="Ebrima"/>
                 <a:cs typeface="Ebrima"/>
               </a:rPr>
-              <a:t>ወዶ ስለመረጥኝ ኢየሱሴ በአብ ቀኝ አስቀመጠኝ (2x)</a:t>
+              <a:t>ወዶ ስለመረጥኝ ኢየሱሴ በአብ ቀኝ አስቀመጠኝ 2x</a:t>
             </a:r>
           </a:p>
         </p:txBody>
@@ -3797,7 +3797,7 @@
                 <a:ea typeface="Ebrima"/>
                 <a:cs typeface="Ebrima"/>
               </a:rPr>
-              <a:t>ተናጠቀልኝ ጠላቴን ተበቀለልኝ (2x)</a:t>
+              <a:t>ተናጠቀልኝ ጠላቴን ተበቀለልኝ 2x</a:t>
             </a:r>
           </a:p>
           <a:p>
@@ -3815,7 +3815,7 @@
                 <a:ea typeface="Ebrima"/>
                 <a:cs typeface="Ebrima"/>
               </a:rPr>
-              <a:t>ተናጠቀልን ጠላትን ተበቀለልን (2x)</a:t>
+              <a:t>ተናጠቀልን ጠላትን ተበቀለልን 2x</a:t>
             </a:r>
           </a:p>
           <a:p>
@@ -3833,7 +3833,7 @@
                 <a:ea typeface="Ebrima"/>
                 <a:cs typeface="Ebrima"/>
               </a:rPr>
-              <a:t>አመለጥን (4x)</a:t>
+              <a:t>አመለጥን 4x</a:t>
             </a:r>
           </a:p>
         </p:txBody>
@@ -3900,7 +3900,7 @@
                 <a:ea typeface="Ebrima"/>
                 <a:cs typeface="Ebrima"/>
               </a:rPr>
-              <a:t>የእግዚአብሔር ምሕረቱ ስፋቱ ጥልቀቱ (2x)</a:t>
+              <a:t>የእግዚአብሔር ምሕረቱ ስፋቱ ጥልቀቱ 2x</a:t>
             </a:r>
           </a:p>
           <a:p>
@@ -3918,7 +3918,7 @@
                 <a:ea typeface="Ebrima"/>
                 <a:cs typeface="Ebrima"/>
               </a:rPr>
-              <a:t>የጌታዬ ቸርነቱ ብዛቱ ጥልቀቱ (2x)</a:t>
+              <a:t>የጌታዬ ቸርነቱ ብዛቱ ጥልቀቱ 2x</a:t>
             </a:r>
           </a:p>
           <a:p>
@@ -3936,7 +3936,7 @@
                 <a:ea typeface="Ebrima"/>
                 <a:cs typeface="Ebrima"/>
               </a:rPr>
-              <a:t>አይደረስበትም (4x)</a:t>
+              <a:t>አይደረስበትም 4x</a:t>
             </a:r>
           </a:p>
         </p:txBody>
